--- a/system-design-101/vi/lessons/sd-07-016/slides/sd-07-016.pptx
+++ b/system-design-101/vi/lessons/sd-07-016/slides/sd-07-016.pptx
@@ -4258,6 +4258,72 @@
               <a:buNone/>
             </a:pPr>
             <a:r>
+              <a:rPr lang="en-US" sz="2100" dirty="0" spc="3" kern="0">
+                <a:solidFill>
+                  <a:srgbClr val="E4E1D8"/>
+                </a:solidFill>
+                <a:latin typeface="Be Vietnam Pro" pitchFamily="34" charset="0"/>
+                <a:ea typeface="Be Vietnam Pro" pitchFamily="34" charset="-122"/>
+                <a:cs typeface="Be Vietnam Pro" pitchFamily="34" charset="-120"/>
+              </a:rPr>
+              <a:t>Đúng</a:t>
+            </a:r>
+            <a:r>
+              <a:rPr lang="en-US" sz="2100" dirty="0" spc="-8" kern="0">
+                <a:solidFill>
+                  <a:srgbClr val="E4E1D8"/>
+                </a:solidFill>
+                <a:latin typeface="Be Vietnam Pro" pitchFamily="34" charset="0"/>
+                <a:ea typeface="Be Vietnam Pro" pitchFamily="34" charset="-122"/>
+                <a:cs typeface="Be Vietnam Pro" pitchFamily="34" charset="-120"/>
+              </a:rPr>
+              <a:t> một</a:t>
+            </a:r>
+            <a:r>
+              <a:rPr lang="en-US" sz="2100" dirty="0" spc="-2" kern="0">
+                <a:solidFill>
+                  <a:srgbClr val="E4E1D8"/>
+                </a:solidFill>
+                <a:latin typeface="Be Vietnam Pro" pitchFamily="34" charset="0"/>
+                <a:ea typeface="Be Vietnam Pro" pitchFamily="34" charset="-122"/>
+                <a:cs typeface="Be Vietnam Pro" pitchFamily="34" charset="-120"/>
+              </a:rPr>
+              <a:t> lần</a:t>
+            </a:r>
+            <a:r>
+              <a:rPr lang="en-US" sz="2100" dirty="0" spc="0" kern="0">
+                <a:solidFill>
+                  <a:srgbClr val="E4E1D8"/>
+                </a:solidFill>
+                <a:latin typeface="Be Vietnam Pro" pitchFamily="34" charset="0"/>
+                <a:ea typeface="Be Vietnam Pro" pitchFamily="34" charset="-122"/>
+                <a:cs typeface="Be Vietnam Pro" pitchFamily="34" charset="-120"/>
+              </a:rPr>
+              <a:t> chỉ</a:t>
+            </a:r>
+            <a:r>
+              <a:rPr lang="en-US" sz="2100" dirty="0" spc="1" kern="0">
+                <a:solidFill>
+                  <a:srgbClr val="E4E1D8"/>
+                </a:solidFill>
+                <a:latin typeface="Be Vietnam Pro" pitchFamily="34" charset="0"/>
+                <a:ea typeface="Be Vietnam Pro" pitchFamily="34" charset="-122"/>
+                <a:cs typeface="Be Vietnam Pro" pitchFamily="34" charset="-120"/>
+              </a:rPr>
+              <a:t> khi</a:t>
+            </a:r>
+            <a:r>
+              <a:rPr lang="en-US" sz="2100" dirty="0" spc="-3" kern="0">
+                <a:solidFill>
+                  <a:srgbClr val="E4E1D8"/>
+                </a:solidFill>
+                <a:latin typeface="Be Vietnam Pro" pitchFamily="34" charset="0"/>
+                <a:ea typeface="Be Vietnam Pro" pitchFamily="34" charset="-122"/>
+                <a:cs typeface="Be Vietnam Pro" pitchFamily="34" charset="-120"/>
+              </a:rPr>
+              <a:t> cả</a:t>
+            </a:r>
+            <a:r>
               <a:rPr lang="en-US" sz="2100" dirty="0" spc="-1" kern="0">
                 <a:solidFill>
                   <a:srgbClr val="E4E1D8"/>
@@ -4266,7 +4332,18 @@
                 <a:ea typeface="Be Vietnam Pro" pitchFamily="34" charset="-122"/>
                 <a:cs typeface="Be Vietnam Pro" pitchFamily="34" charset="-120"/>
               </a:rPr>
-              <a:t>Cả</a:t>
+              <a:t> hai</a:t>
+            </a:r>
+            <a:r>
+              <a:rPr lang="en-US" sz="2100" dirty="0" spc="-15" kern="0">
+                <a:solidFill>
+                  <a:srgbClr val="E4E1D8"/>
+                </a:solidFill>
+                <a:latin typeface="Be Vietnam Pro" pitchFamily="34" charset="0"/>
+                <a:ea typeface="Be Vietnam Pro" pitchFamily="34" charset="-122"/>
+                <a:cs typeface="Be Vietnam Pro" pitchFamily="34" charset="-120"/>
+              </a:rPr>
+              <a:t> vế</a:t>
             </a:r>
             <a:r>
               <a:rPr lang="en-US" sz="2100" dirty="0" spc="0" kern="0">
@@ -4277,10 +4354,10 @@
                 <a:ea typeface="Be Vietnam Pro" pitchFamily="34" charset="-122"/>
                 <a:cs typeface="Be Vietnam Pro" pitchFamily="34" charset="-120"/>
               </a:rPr>
-              <a:t> hai</a:t>
-            </a:r>
-            <a:r>
-              <a:rPr lang="en-US" sz="2100" dirty="0" spc="-16" kern="0">
+              <a:t> cùng</a:t>
+            </a:r>
+            <a:r>
+              <a:rPr lang="en-US" sz="2100" dirty="0" spc="1" kern="0">
                 <a:solidFill>
                   <a:srgbClr val="E4E1D8"/>
                 </a:solidFill>
@@ -4288,95 +4365,7 @@
                 <a:ea typeface="Be Vietnam Pro" pitchFamily="34" charset="-122"/>
                 <a:cs typeface="Be Vietnam Pro" pitchFamily="34" charset="-120"/>
               </a:rPr>
-              <a:t> vế</a:t>
-            </a:r>
-            <a:r>
-              <a:rPr lang="en-US" sz="2100" dirty="0" spc="1" kern="0">
-                <a:solidFill>
-                  <a:srgbClr val="E4E1D8"/>
-                </a:solidFill>
-                <a:latin typeface="Be Vietnam Pro" pitchFamily="34" charset="0"/>
-                <a:ea typeface="Be Vietnam Pro" pitchFamily="34" charset="-122"/>
-                <a:cs typeface="Be Vietnam Pro" pitchFamily="34" charset="-120"/>
-              </a:rPr>
-              <a:t> cùng đúng</a:t>
-            </a:r>
-            <a:r>
-              <a:rPr lang="en-US" sz="2100" dirty="0" spc="-1" kern="0">
-                <a:solidFill>
-                  <a:srgbClr val="E4E1D8"/>
-                </a:solidFill>
-                <a:latin typeface="Be Vietnam Pro" pitchFamily="34" charset="0"/>
-                <a:ea typeface="Be Vietnam Pro" pitchFamily="34" charset="-122"/>
-                <a:cs typeface="Be Vietnam Pro" pitchFamily="34" charset="-120"/>
-              </a:rPr>
-              <a:t> thì</a:t>
-            </a:r>
-            <a:r>
-              <a:rPr lang="en-US" sz="2100" dirty="0" spc="-2" kern="0">
-                <a:solidFill>
-                  <a:srgbClr val="E4E1D8"/>
-                </a:solidFill>
-                <a:latin typeface="Be Vietnam Pro" pitchFamily="34" charset="0"/>
-                <a:ea typeface="Be Vietnam Pro" pitchFamily="34" charset="-122"/>
-                <a:cs typeface="Be Vietnam Pro" pitchFamily="34" charset="-120"/>
-              </a:rPr>
-              <a:t> thao</a:t>
-            </a:r>
-            <a:r>
-              <a:rPr lang="en-US" sz="2100" dirty="0" spc="-13" kern="0">
-                <a:solidFill>
-                  <a:srgbClr val="E4E1D8"/>
-                </a:solidFill>
-                <a:latin typeface="Be Vietnam Pro" pitchFamily="34" charset="0"/>
-                <a:ea typeface="Be Vietnam Pro" pitchFamily="34" charset="-122"/>
-                <a:cs typeface="Be Vietnam Pro" pitchFamily="34" charset="-120"/>
-              </a:rPr>
-              <a:t> tác</a:t>
-            </a:r>
-            <a:r>
-              <a:rPr lang="en-US" sz="2100" dirty="0" spc="-8" kern="0">
-                <a:solidFill>
-                  <a:srgbClr val="E4E1D8"/>
-                </a:solidFill>
-                <a:latin typeface="Be Vietnam Pro" pitchFamily="34" charset="0"/>
-                <a:ea typeface="Be Vietnam Pro" pitchFamily="34" charset="-122"/>
-                <a:cs typeface="Be Vietnam Pro" pitchFamily="34" charset="-120"/>
-              </a:rPr>
-              <a:t> chạy</a:t>
-            </a:r>
-            <a:r>
-              <a:rPr lang="en-US" sz="2100" dirty="0" spc="1" kern="0">
-                <a:solidFill>
-                  <a:srgbClr val="E4E1D8"/>
-                </a:solidFill>
-                <a:latin typeface="Be Vietnam Pro" pitchFamily="34" charset="0"/>
-                <a:ea typeface="Be Vietnam Pro" pitchFamily="34" charset="-122"/>
-                <a:cs typeface="Be Vietnam Pro" pitchFamily="34" charset="-120"/>
-              </a:rPr>
-              <a:t> đúng</a:t>
-            </a:r>
-            <a:r>
-              <a:rPr lang="en-US" sz="2100" dirty="0" spc="-8" kern="0">
-                <a:solidFill>
-                  <a:srgbClr val="E4E1D8"/>
-                </a:solidFill>
-                <a:latin typeface="Be Vietnam Pro" pitchFamily="34" charset="0"/>
-                <a:ea typeface="Be Vietnam Pro" pitchFamily="34" charset="-122"/>
-                <a:cs typeface="Be Vietnam Pro" pitchFamily="34" charset="-120"/>
-              </a:rPr>
-              <a:t> một</a:t>
-            </a:r>
-            <a:r>
-              <a:rPr lang="en-US" sz="2100" dirty="0" spc="-1" kern="0">
-                <a:solidFill>
-                  <a:srgbClr val="E4E1D8"/>
-                </a:solidFill>
-                <a:latin typeface="Be Vietnam Pro" pitchFamily="34" charset="0"/>
-                <a:ea typeface="Be Vietnam Pro" pitchFamily="34" charset="-122"/>
-                <a:cs typeface="Be Vietnam Pro" pitchFamily="34" charset="-120"/>
-              </a:rPr>
-              <a:t> lần.</a:t>
+              <a:t> đúng.</a:t>
             </a:r>
             <a:endParaRPr lang="en-US" sz="2100" dirty="0"/>
           </a:p>
@@ -4714,7 +4703,181 @@
       </p:sp>
       <p:sp>
         <p:nvSpPr>
-          <p:cNvPr id="24" name="Shape 22"/>
+          <p:cNvPr id="24" name="Text 22"/>
+          <p:cNvSpPr/>
+          <p:nvPr/>
+        </p:nvSpPr>
+        <p:spPr>
+          <a:xfrm>
+            <a:off x="914400" y="7524750"/>
+            <a:ext cx="16459200" cy="857250"/>
+          </a:xfrm>
+          <a:prstGeom prst="rect">
+            <a:avLst/>
+          </a:prstGeom>
+          <a:noFill/>
+          <a:ln/>
+        </p:spPr>
+        <p:txBody>
+          <a:bodyPr wrap="square" lIns="0" tIns="11335" rIns="0" bIns="-11335" rtlCol="0" anchor="t"/>
+          <a:lstStyle/>
+          <a:p>
+            <a:pPr algn="l" indent="0" marL="0">
+              <a:lnSpc>
+                <a:spcPts val="2730"/>
+              </a:lnSpc>
+              <a:buNone/>
+            </a:pPr>
+            <a:r>
+              <a:rPr lang="en-US" sz="2100" b="1" dirty="0" spc="-60" kern="0">
+                <a:solidFill>
+                  <a:srgbClr val="FFB454"/>
+                </a:solidFill>
+                <a:latin typeface="Be Vietnam Pro" pitchFamily="34" charset="0"/>
+                <a:ea typeface="Be Vietnam Pro" pitchFamily="34" charset="-122"/>
+                <a:cs typeface="Be Vietnam Pro" pitchFamily="34" charset="-120"/>
+              </a:rPr>
+              <a:t>Và</a:t>
+            </a:r>
+            <a:r>
+              <a:rPr lang="en-US" sz="2100" b="1" dirty="0" spc="-8" kern="0">
+                <a:solidFill>
+                  <a:srgbClr val="FFB454"/>
+                </a:solidFill>
+                <a:latin typeface="Be Vietnam Pro" pitchFamily="34" charset="0"/>
+                <a:ea typeface="Be Vietnam Pro" pitchFamily="34" charset="-122"/>
+                <a:cs typeface="Be Vietnam Pro" pitchFamily="34" charset="-120"/>
+              </a:rPr>
+              <a:t> khóa</a:t>
+            </a:r>
+            <a:r>
+              <a:rPr lang="en-US" sz="2100" b="1" dirty="0" spc="-4" kern="0">
+                <a:solidFill>
+                  <a:srgbClr val="FFB454"/>
+                </a:solidFill>
+                <a:latin typeface="Be Vietnam Pro" pitchFamily="34" charset="0"/>
+                <a:ea typeface="Be Vietnam Pro" pitchFamily="34" charset="-122"/>
+                <a:cs typeface="Be Vietnam Pro" pitchFamily="34" charset="-120"/>
+              </a:rPr>
+              <a:t> phải</a:t>
+            </a:r>
+            <a:r>
+              <a:rPr lang="en-US" sz="2100" b="1" dirty="0" spc="7" kern="0">
+                <a:solidFill>
+                  <a:srgbClr val="FFB454"/>
+                </a:solidFill>
+                <a:latin typeface="Be Vietnam Pro" pitchFamily="34" charset="0"/>
+                <a:ea typeface="Be Vietnam Pro" pitchFamily="34" charset="-122"/>
+                <a:cs typeface="Be Vietnam Pro" pitchFamily="34" charset="-120"/>
+              </a:rPr>
+              <a:t> được</a:t>
+            </a:r>
+            <a:r>
+              <a:rPr lang="en-US" sz="2100" b="1" dirty="0" spc="-3" kern="0">
+                <a:solidFill>
+                  <a:srgbClr val="FFB454"/>
+                </a:solidFill>
+                <a:latin typeface="Be Vietnam Pro" pitchFamily="34" charset="0"/>
+                <a:ea typeface="Be Vietnam Pro" pitchFamily="34" charset="-122"/>
+                <a:cs typeface="Be Vietnam Pro" pitchFamily="34" charset="-120"/>
+              </a:rPr>
+              <a:t> giữ</a:t>
+            </a:r>
+            <a:r>
+              <a:rPr lang="en-US" sz="2100" b="1" dirty="0" spc="-6" kern="0">
+                <a:solidFill>
+                  <a:srgbClr val="FFB454"/>
+                </a:solidFill>
+                <a:latin typeface="Be Vietnam Pro" pitchFamily="34" charset="0"/>
+                <a:ea typeface="Be Vietnam Pro" pitchFamily="34" charset="-122"/>
+                <a:cs typeface="Be Vietnam Pro" pitchFamily="34" charset="-120"/>
+              </a:rPr>
+              <a:t> chỗ</a:t>
+            </a:r>
+            <a:r>
+              <a:rPr lang="en-US" sz="2100" b="1" dirty="0" spc="-13" kern="0">
+                <a:solidFill>
+                  <a:srgbClr val="FFB454"/>
+                </a:solidFill>
+                <a:latin typeface="Be Vietnam Pro" pitchFamily="34" charset="0"/>
+                <a:ea typeface="Be Vietnam Pro" pitchFamily="34" charset="-122"/>
+                <a:cs typeface="Be Vietnam Pro" pitchFamily="34" charset="-120"/>
+              </a:rPr>
+              <a:t> nguyên</a:t>
+            </a:r>
+            <a:r>
+              <a:rPr lang="en-US" sz="2100" b="1" dirty="0" spc="-2" kern="0">
+                <a:solidFill>
+                  <a:srgbClr val="FFB454"/>
+                </a:solidFill>
+                <a:latin typeface="Be Vietnam Pro" pitchFamily="34" charset="0"/>
+                <a:ea typeface="Be Vietnam Pro" pitchFamily="34" charset="-122"/>
+                <a:cs typeface="Be Vietnam Pro" pitchFamily="34" charset="-120"/>
+              </a:rPr>
+              <a:t> tử,</a:t>
+            </a:r>
+            <a:r>
+              <a:rPr lang="en-US" sz="2100" b="1" dirty="0" spc="-30" kern="0">
+                <a:solidFill>
+                  <a:srgbClr val="FFB454"/>
+                </a:solidFill>
+                <a:latin typeface="Be Vietnam Pro" pitchFamily="34" charset="0"/>
+                <a:ea typeface="Be Vietnam Pro" pitchFamily="34" charset="-122"/>
+                <a:cs typeface="Be Vietnam Pro" pitchFamily="34" charset="-120"/>
+              </a:rPr>
+              <a:t> kết</a:t>
+            </a:r>
+            <a:r>
+              <a:rPr lang="en-US" sz="2100" b="1" dirty="0" spc="0" kern="0">
+                <a:solidFill>
+                  <a:srgbClr val="FFB454"/>
+                </a:solidFill>
+                <a:latin typeface="Be Vietnam Pro" pitchFamily="34" charset="0"/>
+                <a:ea typeface="Be Vietnam Pro" pitchFamily="34" charset="-122"/>
+                <a:cs typeface="Be Vietnam Pro" pitchFamily="34" charset="-120"/>
+              </a:rPr>
+              <a:t> quả</a:t>
+            </a:r>
+            <a:r>
+              <a:rPr lang="en-US" sz="2100" b="1" dirty="0" spc="-3" kern="0">
+                <a:solidFill>
+                  <a:srgbClr val="FFB454"/>
+                </a:solidFill>
+                <a:latin typeface="Be Vietnam Pro" pitchFamily="34" charset="0"/>
+                <a:ea typeface="Be Vietnam Pro" pitchFamily="34" charset="-122"/>
+                <a:cs typeface="Be Vietnam Pro" pitchFamily="34" charset="-120"/>
+              </a:rPr>
+              <a:t> phải</a:t>
+            </a:r>
+            <a:r>
+              <a:rPr lang="en-US" sz="2100" b="1" dirty="0" spc="29" kern="0">
+                <a:solidFill>
+                  <a:srgbClr val="FFB454"/>
+                </a:solidFill>
+                <a:latin typeface="Be Vietnam Pro" pitchFamily="34" charset="0"/>
+                <a:ea typeface="Be Vietnam Pro" pitchFamily="34" charset="-122"/>
+                <a:cs typeface="Be Vietnam Pro" pitchFamily="34" charset="-120"/>
+              </a:rPr>
+              <a:t> lưu</a:t>
+            </a:r>
+            <a:r>
+              <a:rPr lang="en-US" sz="2100" b="1" dirty="0" spc="-4" kern="0">
+                <a:solidFill>
+                  <a:srgbClr val="FFB454"/>
+                </a:solidFill>
+                <a:latin typeface="Be Vietnam Pro" pitchFamily="34" charset="0"/>
+                <a:ea typeface="Be Vietnam Pro" pitchFamily="34" charset="-122"/>
+                <a:cs typeface="Be Vietnam Pro" pitchFamily="34" charset="-120"/>
+              </a:rPr>
+              <a:t> bền.</a:t>
+            </a:r>
+            <a:endParaRPr lang="en-US" sz="2100" dirty="0"/>
+          </a:p>
+        </p:txBody>
+      </p:sp>
+      <p:sp>
+        <p:nvSpPr>
+          <p:cNvPr id="25" name="Shape 23"/>
           <p:cNvSpPr/>
           <p:nvPr/>
         </p:nvSpPr>
@@ -4738,7 +4901,7 @@
       </p:sp>
       <p:pic>
         <p:nvPicPr>
-          <p:cNvPr id="25" name="Moda image moda-export-watermark-e0a8a40a-15e4-4482-9339-a8543e52b545" descr="">    </p:cNvPr>
+          <p:cNvPr id="26" name="Moda image moda-export-watermark-e0a8a40a-15e4-4482-9339-a8543e52b545" descr="">    </p:cNvPr>
           <p:cNvPicPr>
             <a:picLocks noChangeAspect="1"/>
           </p:cNvPicPr>
@@ -7137,7 +7300,159 @@
       </p:sp>
       <p:sp>
         <p:nvSpPr>
-          <p:cNvPr id="18" name="Shape 16"/>
+          <p:cNvPr id="18" name="Text 16"/>
+          <p:cNvSpPr/>
+          <p:nvPr/>
+        </p:nvSpPr>
+        <p:spPr>
+          <a:xfrm>
+            <a:off x="914400" y="7524750"/>
+            <a:ext cx="16459200" cy="857250"/>
+          </a:xfrm>
+          <a:prstGeom prst="rect">
+            <a:avLst/>
+          </a:prstGeom>
+          <a:noFill/>
+          <a:ln/>
+        </p:spPr>
+        <p:txBody>
+          <a:bodyPr wrap="square" lIns="0" tIns="11335" rIns="0" bIns="-11335" rtlCol="0" anchor="t"/>
+          <a:lstStyle/>
+          <a:p>
+            <a:pPr algn="l" indent="0" marL="0">
+              <a:lnSpc>
+                <a:spcPts val="2730"/>
+              </a:lnSpc>
+              <a:buNone/>
+            </a:pPr>
+            <a:r>
+              <a:rPr lang="en-US" sz="2100" b="1" dirty="0" spc="0" kern="0">
+                <a:solidFill>
+                  <a:srgbClr val="FFB454"/>
+                </a:solidFill>
+                <a:latin typeface="Be Vietnam Pro" pitchFamily="34" charset="0"/>
+                <a:ea typeface="Be Vietnam Pro" pitchFamily="34" charset="-122"/>
+                <a:cs typeface="Be Vietnam Pro" pitchFamily="34" charset="-120"/>
+              </a:rPr>
+              <a:t>Chỉ</a:t>
+            </a:r>
+            <a:r>
+              <a:rPr lang="en-US" sz="2100" b="1" dirty="0" spc="-3" kern="0">
+                <a:solidFill>
+                  <a:srgbClr val="FFB454"/>
+                </a:solidFill>
+                <a:latin typeface="Be Vietnam Pro" pitchFamily="34" charset="0"/>
+                <a:ea typeface="Be Vietnam Pro" pitchFamily="34" charset="-122"/>
+                <a:cs typeface="Be Vietnam Pro" pitchFamily="34" charset="-120"/>
+              </a:rPr>
+              <a:t> khi giữ</a:t>
+            </a:r>
+            <a:r>
+              <a:rPr lang="en-US" sz="2100" b="1" dirty="0" spc="-6" kern="0">
+                <a:solidFill>
+                  <a:srgbClr val="FFB454"/>
+                </a:solidFill>
+                <a:latin typeface="Be Vietnam Pro" pitchFamily="34" charset="0"/>
+                <a:ea typeface="Be Vietnam Pro" pitchFamily="34" charset="-122"/>
+                <a:cs typeface="Be Vietnam Pro" pitchFamily="34" charset="-120"/>
+              </a:rPr>
+              <a:t> chỗ</a:t>
+            </a:r>
+            <a:r>
+              <a:rPr lang="en-US" sz="2100" b="1" dirty="0" spc="-8" kern="0">
+                <a:solidFill>
+                  <a:srgbClr val="FFB454"/>
+                </a:solidFill>
+                <a:latin typeface="Be Vietnam Pro" pitchFamily="34" charset="0"/>
+                <a:ea typeface="Be Vietnam Pro" pitchFamily="34" charset="-122"/>
+                <a:cs typeface="Be Vietnam Pro" pitchFamily="34" charset="-120"/>
+              </a:rPr>
+              <a:t> khóa</a:t>
+            </a:r>
+            <a:r>
+              <a:rPr lang="en-US" sz="2100" b="1" dirty="0" spc="-13" kern="0">
+                <a:solidFill>
+                  <a:srgbClr val="FFB454"/>
+                </a:solidFill>
+                <a:latin typeface="Be Vietnam Pro" pitchFamily="34" charset="0"/>
+                <a:ea typeface="Be Vietnam Pro" pitchFamily="34" charset="-122"/>
+                <a:cs typeface="Be Vietnam Pro" pitchFamily="34" charset="-120"/>
+              </a:rPr>
+              <a:t> nguyên</a:t>
+            </a:r>
+            <a:r>
+              <a:rPr lang="en-US" sz="2100" b="1" dirty="0" spc="-4" kern="0">
+                <a:solidFill>
+                  <a:srgbClr val="FFB454"/>
+                </a:solidFill>
+                <a:latin typeface="Be Vietnam Pro" pitchFamily="34" charset="0"/>
+                <a:ea typeface="Be Vietnam Pro" pitchFamily="34" charset="-122"/>
+                <a:cs typeface="Be Vietnam Pro" pitchFamily="34" charset="-120"/>
+              </a:rPr>
+              <a:t> tử</a:t>
+            </a:r>
+            <a:r>
+              <a:rPr lang="en-US" sz="2100" b="1" dirty="0" spc="-19" kern="0">
+                <a:solidFill>
+                  <a:srgbClr val="FFB454"/>
+                </a:solidFill>
+                <a:latin typeface="Be Vietnam Pro" pitchFamily="34" charset="0"/>
+                <a:ea typeface="Be Vietnam Pro" pitchFamily="34" charset="-122"/>
+                <a:cs typeface="Be Vietnam Pro" pitchFamily="34" charset="-120"/>
+              </a:rPr>
+              <a:t> và</a:t>
+            </a:r>
+            <a:r>
+              <a:rPr lang="en-US" sz="2100" b="1" dirty="0" spc="29" kern="0">
+                <a:solidFill>
+                  <a:srgbClr val="FFB454"/>
+                </a:solidFill>
+                <a:latin typeface="Be Vietnam Pro" pitchFamily="34" charset="0"/>
+                <a:ea typeface="Be Vietnam Pro" pitchFamily="34" charset="-122"/>
+                <a:cs typeface="Be Vietnam Pro" pitchFamily="34" charset="-120"/>
+              </a:rPr>
+              <a:t> lưu</a:t>
+            </a:r>
+            <a:r>
+              <a:rPr lang="en-US" sz="2100" b="1" dirty="0" spc="-30" kern="0">
+                <a:solidFill>
+                  <a:srgbClr val="FFB454"/>
+                </a:solidFill>
+                <a:latin typeface="Be Vietnam Pro" pitchFamily="34" charset="0"/>
+                <a:ea typeface="Be Vietnam Pro" pitchFamily="34" charset="-122"/>
+                <a:cs typeface="Be Vietnam Pro" pitchFamily="34" charset="-120"/>
+              </a:rPr>
+              <a:t> kết</a:t>
+            </a:r>
+            <a:r>
+              <a:rPr lang="en-US" sz="2100" b="1" dirty="0" spc="1" kern="0">
+                <a:solidFill>
+                  <a:srgbClr val="FFB454"/>
+                </a:solidFill>
+                <a:latin typeface="Be Vietnam Pro" pitchFamily="34" charset="0"/>
+                <a:ea typeface="Be Vietnam Pro" pitchFamily="34" charset="-122"/>
+                <a:cs typeface="Be Vietnam Pro" pitchFamily="34" charset="-120"/>
+              </a:rPr>
+              <a:t> quả</a:t>
+            </a:r>
+            <a:r>
+              <a:rPr lang="en-US" sz="2100" b="1" dirty="0" spc="-4" kern="0">
+                <a:solidFill>
+                  <a:srgbClr val="FFB454"/>
+                </a:solidFill>
+                <a:latin typeface="Be Vietnam Pro" pitchFamily="34" charset="0"/>
+                <a:ea typeface="Be Vietnam Pro" pitchFamily="34" charset="-122"/>
+                <a:cs typeface="Be Vietnam Pro" pitchFamily="34" charset="-120"/>
+              </a:rPr>
+              <a:t> bền.</a:t>
+            </a:r>
+            <a:endParaRPr lang="en-US" sz="2100" dirty="0"/>
+          </a:p>
+        </p:txBody>
+      </p:sp>
+      <p:sp>
+        <p:nvSpPr>
+          <p:cNvPr id="19" name="Shape 17"/>
           <p:cNvSpPr/>
           <p:nvPr/>
         </p:nvSpPr>
@@ -7161,7 +7476,7 @@
       </p:sp>
       <p:pic>
         <p:nvPicPr>
-          <p:cNvPr id="19" name="Moda image moda-export-watermark-a5cf0036-8a10-4b6b-9b83-5a2eb0211a64" descr="">    </p:cNvPr>
+          <p:cNvPr id="20" name="Moda image moda-export-watermark-a5cf0036-8a10-4b6b-9b83-5a2eb0211a64" descr="">    </p:cNvPr>
           <p:cNvPicPr>
             <a:picLocks noChangeAspect="1"/>
           </p:cNvPicPr>
@@ -8375,7 +8690,423 @@
       </p:sp>
       <p:sp>
         <p:nvSpPr>
-          <p:cNvPr id="23" name="Shape 21"/>
+          <p:cNvPr id="23" name="Text 21"/>
+          <p:cNvSpPr/>
+          <p:nvPr/>
+        </p:nvSpPr>
+        <p:spPr>
+          <a:xfrm>
+            <a:off x="914400" y="7429500"/>
+            <a:ext cx="16459200" cy="1238250"/>
+          </a:xfrm>
+          <a:prstGeom prst="rect">
+            <a:avLst/>
+          </a:prstGeom>
+          <a:noFill/>
+          <a:ln/>
+        </p:spPr>
+        <p:txBody>
+          <a:bodyPr wrap="square" lIns="0" tIns="12144" rIns="0" bIns="-12144" rtlCol="0" anchor="t"/>
+          <a:lstStyle/>
+          <a:p>
+            <a:pPr algn="l" indent="0" marL="0">
+              <a:lnSpc>
+                <a:spcPts val="2925"/>
+              </a:lnSpc>
+              <a:buNone/>
+            </a:pPr>
+            <a:r>
+              <a:rPr lang="en-US" sz="2250" b="1" dirty="0" spc="-5" kern="0">
+                <a:solidFill>
+                  <a:srgbClr val="B45309"/>
+                </a:solidFill>
+                <a:latin typeface="Be Vietnam Pro" pitchFamily="34" charset="0"/>
+                <a:ea typeface="Be Vietnam Pro" pitchFamily="34" charset="-122"/>
+                <a:cs typeface="Be Vietnam Pro" pitchFamily="34" charset="-120"/>
+              </a:rPr>
+              <a:t>Đúng</a:t>
+            </a:r>
+            <a:r>
+              <a:rPr lang="en-US" sz="2250" b="1" dirty="0" spc="-6" kern="0">
+                <a:solidFill>
+                  <a:srgbClr val="B45309"/>
+                </a:solidFill>
+                <a:latin typeface="Be Vietnam Pro" pitchFamily="34" charset="0"/>
+                <a:ea typeface="Be Vietnam Pro" pitchFamily="34" charset="-122"/>
+                <a:cs typeface="Be Vietnam Pro" pitchFamily="34" charset="-120"/>
+              </a:rPr>
+              <a:t> một</a:t>
+            </a:r>
+            <a:r>
+              <a:rPr lang="en-US" sz="2250" b="1" dirty="0" spc="-1" kern="0">
+                <a:solidFill>
+                  <a:srgbClr val="B45309"/>
+                </a:solidFill>
+                <a:latin typeface="Be Vietnam Pro" pitchFamily="34" charset="0"/>
+                <a:ea typeface="Be Vietnam Pro" pitchFamily="34" charset="-122"/>
+                <a:cs typeface="Be Vietnam Pro" pitchFamily="34" charset="-120"/>
+              </a:rPr>
+              <a:t> lần</a:t>
+            </a:r>
+            <a:r>
+              <a:rPr lang="en-US" sz="2250" b="1" dirty="0" spc="0" kern="0">
+                <a:solidFill>
+                  <a:srgbClr val="B45309"/>
+                </a:solidFill>
+                <a:latin typeface="Be Vietnam Pro" pitchFamily="34" charset="0"/>
+                <a:ea typeface="Be Vietnam Pro" pitchFamily="34" charset="-122"/>
+                <a:cs typeface="Be Vietnam Pro" pitchFamily="34" charset="-120"/>
+              </a:rPr>
+              <a:t> cần</a:t>
+            </a:r>
+            <a:r>
+              <a:rPr lang="en-US" sz="2250" b="1" dirty="0" spc="-1" kern="0">
+                <a:solidFill>
+                  <a:srgbClr val="B45309"/>
+                </a:solidFill>
+                <a:latin typeface="Be Vietnam Pro" pitchFamily="34" charset="0"/>
+                <a:ea typeface="Be Vietnam Pro" pitchFamily="34" charset="-122"/>
+                <a:cs typeface="Be Vietnam Pro" pitchFamily="34" charset="-120"/>
+              </a:rPr>
+              <a:t> khóa</a:t>
+            </a:r>
+            <a:r>
+              <a:rPr lang="en-US" sz="2250" b="1" dirty="0" spc="2" kern="0">
+                <a:solidFill>
+                  <a:srgbClr val="B45309"/>
+                </a:solidFill>
+                <a:latin typeface="Be Vietnam Pro" pitchFamily="34" charset="0"/>
+                <a:ea typeface="Be Vietnam Pro" pitchFamily="34" charset="-122"/>
+                <a:cs typeface="Be Vietnam Pro" pitchFamily="34" charset="-120"/>
+              </a:rPr>
+              <a:t> giữ</a:t>
+            </a:r>
+            <a:r>
+              <a:rPr lang="en-US" sz="2250" b="1" dirty="0" spc="1" kern="0">
+                <a:solidFill>
+                  <a:srgbClr val="B45309"/>
+                </a:solidFill>
+                <a:latin typeface="Be Vietnam Pro" pitchFamily="34" charset="0"/>
+                <a:ea typeface="Be Vietnam Pro" pitchFamily="34" charset="-122"/>
+                <a:cs typeface="Be Vietnam Pro" pitchFamily="34" charset="-120"/>
+              </a:rPr>
+              <a:t> chỗ</a:t>
+            </a:r>
+            <a:r>
+              <a:rPr lang="en-US" sz="2250" b="1" dirty="0" spc="-14" kern="0">
+                <a:solidFill>
+                  <a:srgbClr val="B45309"/>
+                </a:solidFill>
+                <a:latin typeface="Be Vietnam Pro" pitchFamily="34" charset="0"/>
+                <a:ea typeface="Be Vietnam Pro" pitchFamily="34" charset="-122"/>
+                <a:cs typeface="Be Vietnam Pro" pitchFamily="34" charset="-120"/>
+              </a:rPr>
+              <a:t> nguyên</a:t>
+            </a:r>
+            <a:r>
+              <a:rPr lang="en-US" sz="2250" b="1" dirty="0" spc="1" kern="0">
+                <a:solidFill>
+                  <a:srgbClr val="B45309"/>
+                </a:solidFill>
+                <a:latin typeface="Be Vietnam Pro" pitchFamily="34" charset="0"/>
+                <a:ea typeface="Be Vietnam Pro" pitchFamily="34" charset="-122"/>
+                <a:cs typeface="Be Vietnam Pro" pitchFamily="34" charset="-120"/>
+              </a:rPr>
+              <a:t> tử (hai</a:t>
+            </a:r>
+            <a:r>
+              <a:rPr lang="en-US" sz="2250" b="1" dirty="0" spc="-15" kern="0">
+                <a:solidFill>
+                  <a:srgbClr val="B45309"/>
+                </a:solidFill>
+                <a:latin typeface="Be Vietnam Pro" pitchFamily="34" charset="0"/>
+                <a:ea typeface="Be Vietnam Pro" pitchFamily="34" charset="-122"/>
+                <a:cs typeface="Be Vietnam Pro" pitchFamily="34" charset="-120"/>
+              </a:rPr>
+              <a:t> yêu</a:t>
+            </a:r>
+            <a:r>
+              <a:rPr lang="en-US" sz="2250" b="1" dirty="0" spc="3" kern="0">
+                <a:solidFill>
+                  <a:srgbClr val="B45309"/>
+                </a:solidFill>
+                <a:latin typeface="Be Vietnam Pro" pitchFamily="34" charset="0"/>
+                <a:ea typeface="Be Vietnam Pro" pitchFamily="34" charset="-122"/>
+                <a:cs typeface="Be Vietnam Pro" pitchFamily="34" charset="-120"/>
+              </a:rPr>
+              <a:t> cầu</a:t>
+            </a:r>
+            <a:r>
+              <a:rPr lang="en-US" sz="2250" b="1" dirty="0" spc="-3" kern="0">
+                <a:solidFill>
+                  <a:srgbClr val="B45309"/>
+                </a:solidFill>
+                <a:latin typeface="Be Vietnam Pro" pitchFamily="34" charset="0"/>
+                <a:ea typeface="Be Vietnam Pro" pitchFamily="34" charset="-122"/>
+                <a:cs typeface="Be Vietnam Pro" pitchFamily="34" charset="-120"/>
+              </a:rPr>
+              <a:t> cùng</a:t>
+            </a:r>
+            <a:r>
+              <a:rPr lang="en-US" sz="2250" b="1" dirty="0" spc="-1" kern="0">
+                <a:solidFill>
+                  <a:srgbClr val="B45309"/>
+                </a:solidFill>
+                <a:latin typeface="Be Vietnam Pro" pitchFamily="34" charset="0"/>
+                <a:ea typeface="Be Vietnam Pro" pitchFamily="34" charset="-122"/>
+                <a:cs typeface="Be Vietnam Pro" pitchFamily="34" charset="-120"/>
+              </a:rPr>
+              <a:t> khóa</a:t>
+            </a:r>
+            <a:r>
+              <a:rPr lang="en-US" sz="2250" b="1" dirty="0" spc="-6" kern="0">
+                <a:solidFill>
+                  <a:srgbClr val="B45309"/>
+                </a:solidFill>
+                <a:latin typeface="Be Vietnam Pro" pitchFamily="34" charset="0"/>
+                <a:ea typeface="Be Vietnam Pro" pitchFamily="34" charset="-122"/>
+                <a:cs typeface="Be Vietnam Pro" pitchFamily="34" charset="-120"/>
+              </a:rPr>
+              <a:t> không</a:t>
+            </a:r>
+            <a:r>
+              <a:rPr lang="en-US" sz="2250" b="1" dirty="0" spc="-2" kern="0">
+                <a:solidFill>
+                  <a:srgbClr val="B45309"/>
+                </a:solidFill>
+                <a:latin typeface="Be Vietnam Pro" pitchFamily="34" charset="0"/>
+                <a:ea typeface="Be Vietnam Pro" pitchFamily="34" charset="-122"/>
+                <a:cs typeface="Be Vietnam Pro" pitchFamily="34" charset="-120"/>
+              </a:rPr>
+              <a:t> cùng</a:t>
+            </a:r>
+            <a:r>
+              <a:rPr lang="en-US" sz="2250" b="1" dirty="0" spc="-4" kern="0">
+                <a:solidFill>
+                  <a:srgbClr val="B45309"/>
+                </a:solidFill>
+                <a:latin typeface="Be Vietnam Pro" pitchFamily="34" charset="0"/>
+                <a:ea typeface="Be Vietnam Pro" pitchFamily="34" charset="-122"/>
+                <a:cs typeface="Be Vietnam Pro" pitchFamily="34" charset="-120"/>
+              </a:rPr>
+              <a:t> chạy)</a:t>
+            </a:r>
+            <a:r>
+              <a:rPr lang="en-US" sz="2250" b="1" dirty="0" spc="-17" kern="0">
+                <a:solidFill>
+                  <a:srgbClr val="B45309"/>
+                </a:solidFill>
+                <a:latin typeface="Be Vietnam Pro" pitchFamily="34" charset="0"/>
+                <a:ea typeface="Be Vietnam Pro" pitchFamily="34" charset="-122"/>
+                <a:cs typeface="Be Vietnam Pro" pitchFamily="34" charset="-120"/>
+              </a:rPr>
+              <a:t> và</a:t>
+            </a:r>
+            <a:r>
+              <a:rPr lang="en-US" sz="2250" b="1" dirty="0" spc="-27" kern="0">
+                <a:solidFill>
+                  <a:srgbClr val="B45309"/>
+                </a:solidFill>
+                <a:latin typeface="Be Vietnam Pro" pitchFamily="34" charset="0"/>
+                <a:ea typeface="Be Vietnam Pro" pitchFamily="34" charset="-122"/>
+                <a:cs typeface="Be Vietnam Pro" pitchFamily="34" charset="-120"/>
+              </a:rPr>
+              <a:t> kết</a:t>
+            </a:r>
+            <a:r>
+              <a:rPr lang="en-US" sz="2250" b="1" dirty="0" spc="3" kern="0">
+                <a:solidFill>
+                  <a:srgbClr val="B45309"/>
+                </a:solidFill>
+                <a:latin typeface="Be Vietnam Pro" pitchFamily="34" charset="0"/>
+                <a:ea typeface="Be Vietnam Pro" pitchFamily="34" charset="-122"/>
+                <a:cs typeface="Be Vietnam Pro" pitchFamily="34" charset="-120"/>
+              </a:rPr>
+              <a:t> quả</a:t>
+            </a:r>
+            <a:r>
+              <a:rPr lang="en-US" sz="2250" b="1" dirty="0" spc="29" kern="0">
+                <a:solidFill>
+                  <a:srgbClr val="B45309"/>
+                </a:solidFill>
+                <a:latin typeface="Be Vietnam Pro" pitchFamily="34" charset="0"/>
+                <a:ea typeface="Be Vietnam Pro" pitchFamily="34" charset="-122"/>
+                <a:cs typeface="Be Vietnam Pro" pitchFamily="34" charset="-120"/>
+              </a:rPr>
+              <a:t> lưu</a:t>
+            </a:r>
+            <a:r>
+              <a:rPr lang="en-US" sz="2250" b="1" dirty="0" spc="-3" kern="0">
+                <a:solidFill>
+                  <a:srgbClr val="B45309"/>
+                </a:solidFill>
+                <a:latin typeface="Be Vietnam Pro" pitchFamily="34" charset="0"/>
+                <a:ea typeface="Be Vietnam Pro" pitchFamily="34" charset="-122"/>
+                <a:cs typeface="Be Vietnam Pro" pitchFamily="34" charset="-120"/>
+              </a:rPr>
+              <a:t> bền.</a:t>
+            </a:r>
+            <a:r>
+              <a:rPr lang="en-US" sz="2250" b="1" dirty="0" spc="4" kern="0">
+                <a:solidFill>
+                  <a:srgbClr val="B45309"/>
+                </a:solidFill>
+                <a:latin typeface="Be Vietnam Pro" pitchFamily="34" charset="0"/>
+                <a:ea typeface="Be Vietnam Pro" pitchFamily="34" charset="-122"/>
+                <a:cs typeface="Be Vietnam Pro" pitchFamily="34" charset="-120"/>
+              </a:rPr>
+              <a:t> Thiếu</a:t>
+            </a:r>
+            <a:r>
+              <a:rPr lang="en-US" sz="2250" b="1" dirty="0" spc="-4" kern="0">
+                <a:solidFill>
+                  <a:srgbClr val="B45309"/>
+                </a:solidFill>
+                <a:latin typeface="Be Vietnam Pro" pitchFamily="34" charset="0"/>
+                <a:ea typeface="Be Vietnam Pro" pitchFamily="34" charset="-122"/>
+                <a:cs typeface="Be Vietnam Pro" pitchFamily="34" charset="-120"/>
+              </a:rPr>
+              <a:t> một,</a:t>
+            </a:r>
+            <a:r>
+              <a:rPr lang="en-US" sz="2250" b="1" dirty="0" spc="3" kern="0">
+                <a:solidFill>
+                  <a:srgbClr val="B45309"/>
+                </a:solidFill>
+                <a:latin typeface="Be Vietnam Pro" pitchFamily="34" charset="0"/>
+                <a:ea typeface="Be Vietnam Pro" pitchFamily="34" charset="-122"/>
+                <a:cs typeface="Be Vietnam Pro" pitchFamily="34" charset="-120"/>
+              </a:rPr>
+              <a:t> hai</a:t>
+            </a:r>
+            <a:r>
+              <a:rPr lang="en-US" sz="2250" b="1" dirty="0" spc="-1" kern="0">
+                <a:solidFill>
+                  <a:srgbClr val="B45309"/>
+                </a:solidFill>
+                <a:latin typeface="Be Vietnam Pro" pitchFamily="34" charset="0"/>
+                <a:ea typeface="Be Vietnam Pro" pitchFamily="34" charset="-122"/>
+                <a:cs typeface="Be Vietnam Pro" pitchFamily="34" charset="-120"/>
+              </a:rPr>
+              <a:t> lần</a:t>
+            </a:r>
+            <a:r>
+              <a:rPr lang="en-US" sz="2250" b="1" dirty="0" spc="2" kern="0">
+                <a:solidFill>
+                  <a:srgbClr val="B45309"/>
+                </a:solidFill>
+                <a:latin typeface="Be Vietnam Pro" pitchFamily="34" charset="0"/>
+                <a:ea typeface="Be Vietnam Pro" pitchFamily="34" charset="-122"/>
+                <a:cs typeface="Be Vietnam Pro" pitchFamily="34" charset="-120"/>
+              </a:rPr>
+              <a:t> thử</a:t>
+            </a:r>
+            <a:r>
+              <a:rPr lang="en-US" sz="2250" b="1" dirty="0" spc="-1" kern="0">
+                <a:solidFill>
+                  <a:srgbClr val="B45309"/>
+                </a:solidFill>
+                <a:latin typeface="Be Vietnam Pro" pitchFamily="34" charset="0"/>
+                <a:ea typeface="Be Vietnam Pro" pitchFamily="34" charset="-122"/>
+                <a:cs typeface="Be Vietnam Pro" pitchFamily="34" charset="-120"/>
+              </a:rPr>
+              <a:t> đồng</a:t>
+            </a:r>
+            <a:r>
+              <a:rPr lang="en-US" sz="2250" b="1" dirty="0" spc="5" kern="0">
+                <a:solidFill>
+                  <a:srgbClr val="B45309"/>
+                </a:solidFill>
+                <a:latin typeface="Be Vietnam Pro" pitchFamily="34" charset="0"/>
+                <a:ea typeface="Be Vietnam Pro" pitchFamily="34" charset="-122"/>
+                <a:cs typeface="Be Vietnam Pro" pitchFamily="34" charset="-120"/>
+              </a:rPr>
+              <a:t> thời</a:t>
+            </a:r>
+            <a:r>
+              <a:rPr lang="en-US" sz="2250" b="1" dirty="0" spc="-12" kern="0">
+                <a:solidFill>
+                  <a:srgbClr val="B45309"/>
+                </a:solidFill>
+                <a:latin typeface="Be Vietnam Pro" pitchFamily="34" charset="0"/>
+                <a:ea typeface="Be Vietnam Pro" pitchFamily="34" charset="-122"/>
+                <a:cs typeface="Be Vietnam Pro" pitchFamily="34" charset="-120"/>
+              </a:rPr>
+              <a:t> vẫn</a:t>
+            </a:r>
+            <a:r>
+              <a:rPr lang="en-US" sz="2250" b="1" dirty="0" spc="0" kern="0">
+                <a:solidFill>
+                  <a:srgbClr val="B45309"/>
+                </a:solidFill>
+                <a:latin typeface="Be Vietnam Pro" pitchFamily="34" charset="0"/>
+                <a:ea typeface="Be Vietnam Pro" pitchFamily="34" charset="-122"/>
+                <a:cs typeface="Be Vietnam Pro" pitchFamily="34" charset="-120"/>
+              </a:rPr>
+              <a:t> có</a:t>
+            </a:r>
+            <a:r>
+              <a:rPr lang="en-US" sz="2250" b="1" dirty="0" spc="-1" kern="0">
+                <a:solidFill>
+                  <a:srgbClr val="B45309"/>
+                </a:solidFill>
+                <a:latin typeface="Be Vietnam Pro" pitchFamily="34" charset="0"/>
+                <a:ea typeface="Be Vietnam Pro" pitchFamily="34" charset="-122"/>
+                <a:cs typeface="Be Vietnam Pro" pitchFamily="34" charset="-120"/>
+              </a:rPr>
+              <a:t> thể</a:t>
+            </a:r>
+            <a:r>
+              <a:rPr lang="en-US" sz="2250" b="1" dirty="0" spc="2" kern="0">
+                <a:solidFill>
+                  <a:srgbClr val="B45309"/>
+                </a:solidFill>
+                <a:latin typeface="Be Vietnam Pro" pitchFamily="34" charset="0"/>
+                <a:ea typeface="Be Vietnam Pro" pitchFamily="34" charset="-122"/>
+                <a:cs typeface="Be Vietnam Pro" pitchFamily="34" charset="-120"/>
+              </a:rPr>
+              <a:t> trừ</a:t>
+            </a:r>
+            <a:r>
+              <a:rPr lang="en-US" sz="2250" b="1" dirty="0" spc="-1" kern="0">
+                <a:solidFill>
+                  <a:srgbClr val="B45309"/>
+                </a:solidFill>
+                <a:latin typeface="Be Vietnam Pro" pitchFamily="34" charset="0"/>
+                <a:ea typeface="Be Vietnam Pro" pitchFamily="34" charset="-122"/>
+                <a:cs typeface="Be Vietnam Pro" pitchFamily="34" charset="-120"/>
+              </a:rPr>
+              <a:t> tiền</a:t>
+            </a:r>
+            <a:r>
+              <a:rPr lang="en-US" sz="2250" b="1" dirty="0" spc="3" kern="0">
+                <a:solidFill>
+                  <a:srgbClr val="B45309"/>
+                </a:solidFill>
+                <a:latin typeface="Be Vietnam Pro" pitchFamily="34" charset="0"/>
+                <a:ea typeface="Be Vietnam Pro" pitchFamily="34" charset="-122"/>
+                <a:cs typeface="Be Vietnam Pro" pitchFamily="34" charset="-120"/>
+              </a:rPr>
+              <a:t> hai</a:t>
+            </a:r>
+            <a:r>
+              <a:rPr lang="en-US" sz="2250" b="1" dirty="0" spc="0" kern="0">
+                <a:solidFill>
+                  <a:srgbClr val="B45309"/>
+                </a:solidFill>
+                <a:latin typeface="Be Vietnam Pro" pitchFamily="34" charset="0"/>
+                <a:ea typeface="Be Vietnam Pro" pitchFamily="34" charset="-122"/>
+                <a:cs typeface="Be Vietnam Pro" pitchFamily="34" charset="-120"/>
+              </a:rPr>
+              <a:t> lần.</a:t>
+            </a:r>
+            <a:endParaRPr lang="en-US" sz="2250" dirty="0"/>
+          </a:p>
+        </p:txBody>
+      </p:sp>
+      <p:sp>
+        <p:nvSpPr>
+          <p:cNvPr id="24" name="Shape 22"/>
           <p:cNvSpPr/>
           <p:nvPr/>
         </p:nvSpPr>
@@ -8399,7 +9130,7 @@
       </p:sp>
       <p:pic>
         <p:nvPicPr>
-          <p:cNvPr id="24" name="Moda image moda-export-watermark-d2ea071b-0314-4410-9e38-eda298b18442" descr="">    </p:cNvPr>
+          <p:cNvPr id="25" name="Moda image moda-export-watermark-d2ea071b-0314-4410-9e38-eda298b18442" descr="">    </p:cNvPr>
           <p:cNvPicPr>
             <a:picLocks noChangeAspect="1"/>
           </p:cNvPicPr>
